--- a/experiment/Instructions.pptx
+++ b/experiment/Instructions.pptx
@@ -5,7 +5,7 @@
     <p:sldMasterId id="2147483648" r:id="rId1"/>
   </p:sldMasterIdLst>
   <p:notesMasterIdLst>
-    <p:notesMasterId r:id="rId15"/>
+    <p:notesMasterId r:id="rId13"/>
   </p:notesMasterIdLst>
   <p:sldIdLst>
     <p:sldId id="256" r:id="rId2"/>
@@ -13,14 +13,12 @@
     <p:sldId id="263" r:id="rId4"/>
     <p:sldId id="264" r:id="rId5"/>
     <p:sldId id="265" r:id="rId6"/>
-    <p:sldId id="266" r:id="rId7"/>
-    <p:sldId id="259" r:id="rId8"/>
-    <p:sldId id="260" r:id="rId9"/>
-    <p:sldId id="261" r:id="rId10"/>
-    <p:sldId id="267" r:id="rId11"/>
-    <p:sldId id="268" r:id="rId12"/>
-    <p:sldId id="262" r:id="rId13"/>
-    <p:sldId id="257" r:id="rId14"/>
+    <p:sldId id="260" r:id="rId7"/>
+    <p:sldId id="261" r:id="rId8"/>
+    <p:sldId id="267" r:id="rId9"/>
+    <p:sldId id="268" r:id="rId10"/>
+    <p:sldId id="269" r:id="rId11"/>
+    <p:sldId id="257" r:id="rId12"/>
   </p:sldIdLst>
   <p:sldSz cx="12192000" cy="6858000"/>
   <p:notesSz cx="6858000" cy="9144000"/>
@@ -209,7 +207,7 @@
           <a:p>
             <a:fld id="{BDD45EF6-D8B7-3448-96D6-322676312637}" type="datetimeFigureOut">
               <a:rPr lang="en-BE" smtClean="0"/>
-              <a:t>03/11/2025</a:t>
+              <a:t>07/05/2026</a:t>
             </a:fld>
             <a:endParaRPr lang="en-BE"/>
           </a:p>
@@ -893,114 +891,6 @@
   <p:cSld>
     <p:spTree>
       <p:nvGrpSpPr>
-        <p:cNvPr id="1" name="">
-          <a:extLst>
-            <a:ext uri="{FF2B5EF4-FFF2-40B4-BE49-F238E27FC236}">
-              <a16:creationId xmlns:a16="http://schemas.microsoft.com/office/drawing/2014/main" id="{8053DFA4-86D1-1C75-E061-C973B858656B}"/>
-            </a:ext>
-          </a:extLst>
-        </p:cNvPr>
-        <p:cNvGrpSpPr/>
-        <p:nvPr/>
-      </p:nvGrpSpPr>
-      <p:grpSpPr>
-        <a:xfrm>
-          <a:off x="0" y="0"/>
-          <a:ext cx="0" cy="0"/>
-          <a:chOff x="0" y="0"/>
-          <a:chExt cx="0" cy="0"/>
-        </a:xfrm>
-      </p:grpSpPr>
-      <p:sp>
-        <p:nvSpPr>
-          <p:cNvPr id="2" name="Slide Image Placeholder 1">
-            <a:extLst>
-              <a:ext uri="{FF2B5EF4-FFF2-40B4-BE49-F238E27FC236}">
-                <a16:creationId xmlns:a16="http://schemas.microsoft.com/office/drawing/2014/main" id="{EE944E35-1802-EDDB-1B0F-DD16A0E7DFEE}"/>
-              </a:ext>
-            </a:extLst>
-          </p:cNvPr>
-          <p:cNvSpPr>
-            <a:spLocks noGrp="1" noRot="1" noChangeAspect="1"/>
-          </p:cNvSpPr>
-          <p:nvPr>
-            <p:ph type="sldImg"/>
-          </p:nvPr>
-        </p:nvSpPr>
-        <p:spPr/>
-      </p:sp>
-      <p:sp>
-        <p:nvSpPr>
-          <p:cNvPr id="3" name="Notes Placeholder 2">
-            <a:extLst>
-              <a:ext uri="{FF2B5EF4-FFF2-40B4-BE49-F238E27FC236}">
-                <a16:creationId xmlns:a16="http://schemas.microsoft.com/office/drawing/2014/main" id="{96F02EE1-FE43-634D-8FBC-0AFFC9A809AB}"/>
-              </a:ext>
-            </a:extLst>
-          </p:cNvPr>
-          <p:cNvSpPr>
-            <a:spLocks noGrp="1"/>
-          </p:cNvSpPr>
-          <p:nvPr>
-            <p:ph type="body" idx="1"/>
-          </p:nvPr>
-        </p:nvSpPr>
-        <p:spPr/>
-        <p:txBody>
-          <a:bodyPr/>
-          <a:lstStyle/>
-          <a:p>
-            <a:endParaRPr lang="en-BE" dirty="0"/>
-          </a:p>
-        </p:txBody>
-      </p:sp>
-      <p:sp>
-        <p:nvSpPr>
-          <p:cNvPr id="4" name="Slide Number Placeholder 3">
-            <a:extLst>
-              <a:ext uri="{FF2B5EF4-FFF2-40B4-BE49-F238E27FC236}">
-                <a16:creationId xmlns:a16="http://schemas.microsoft.com/office/drawing/2014/main" id="{DC8666CB-883A-B542-8549-3EC45A2406A4}"/>
-              </a:ext>
-            </a:extLst>
-          </p:cNvPr>
-          <p:cNvSpPr>
-            <a:spLocks noGrp="1"/>
-          </p:cNvSpPr>
-          <p:nvPr>
-            <p:ph type="sldNum" sz="quarter" idx="5"/>
-          </p:nvPr>
-        </p:nvSpPr>
-        <p:spPr/>
-        <p:txBody>
-          <a:bodyPr/>
-          <a:lstStyle/>
-          <a:p>
-            <a:fld id="{F62A6887-9C98-114E-B7C9-E50A9DAB836F}" type="slidenum">
-              <a:rPr lang="en-BE" smtClean="0"/>
-              <a:t>6</a:t>
-            </a:fld>
-            <a:endParaRPr lang="en-BE"/>
-          </a:p>
-        </p:txBody>
-      </p:sp>
-    </p:spTree>
-    <p:extLst>
-      <p:ext uri="{BB962C8B-B14F-4D97-AF65-F5344CB8AC3E}">
-        <p14:creationId xmlns:p14="http://schemas.microsoft.com/office/powerpoint/2010/main" val="1921707358"/>
-      </p:ext>
-    </p:extLst>
-  </p:cSld>
-  <p:clrMapOvr>
-    <a:masterClrMapping/>
-  </p:clrMapOvr>
-</p:notes>
-</file>
-
-<file path=ppt/notesSlides/notesSlide6.xml><?xml version="1.0" encoding="utf-8"?>
-<p:notes xmlns:a="http://schemas.openxmlformats.org/drawingml/2006/main" xmlns:r="http://schemas.openxmlformats.org/officeDocument/2006/relationships" xmlns:p="http://schemas.openxmlformats.org/presentationml/2006/main">
-  <p:cSld>
-    <p:spTree>
-      <p:nvGrpSpPr>
         <p:cNvPr id="1" name=""/>
         <p:cNvGrpSpPr/>
         <p:nvPr/>
@@ -1061,7 +951,7 @@
           <a:p>
             <a:fld id="{F62A6887-9C98-114E-B7C9-E50A9DAB836F}" type="slidenum">
               <a:rPr lang="en-BE" smtClean="0"/>
-              <a:t>13</a:t>
+              <a:t>11</a:t>
             </a:fld>
             <a:endParaRPr lang="en-BE"/>
           </a:p>
@@ -1229,7 +1119,7 @@
           <a:p>
             <a:fld id="{D8AE07B1-8807-B34B-B9EE-E033661A8799}" type="datetimeFigureOut">
               <a:rPr lang="en-BE" smtClean="0"/>
-              <a:t>03/11/2025</a:t>
+              <a:t>07/05/2026</a:t>
             </a:fld>
             <a:endParaRPr lang="en-BE"/>
           </a:p>
@@ -1429,7 +1319,7 @@
           <a:p>
             <a:fld id="{D8AE07B1-8807-B34B-B9EE-E033661A8799}" type="datetimeFigureOut">
               <a:rPr lang="en-BE" smtClean="0"/>
-              <a:t>03/11/2025</a:t>
+              <a:t>07/05/2026</a:t>
             </a:fld>
             <a:endParaRPr lang="en-BE"/>
           </a:p>
@@ -1639,7 +1529,7 @@
           <a:p>
             <a:fld id="{D8AE07B1-8807-B34B-B9EE-E033661A8799}" type="datetimeFigureOut">
               <a:rPr lang="en-BE" smtClean="0"/>
-              <a:t>03/11/2025</a:t>
+              <a:t>07/05/2026</a:t>
             </a:fld>
             <a:endParaRPr lang="en-BE"/>
           </a:p>
@@ -1839,7 +1729,7 @@
           <a:p>
             <a:fld id="{D8AE07B1-8807-B34B-B9EE-E033661A8799}" type="datetimeFigureOut">
               <a:rPr lang="en-BE" smtClean="0"/>
-              <a:t>03/11/2025</a:t>
+              <a:t>07/05/2026</a:t>
             </a:fld>
             <a:endParaRPr lang="en-BE"/>
           </a:p>
@@ -2115,7 +2005,7 @@
           <a:p>
             <a:fld id="{D8AE07B1-8807-B34B-B9EE-E033661A8799}" type="datetimeFigureOut">
               <a:rPr lang="en-BE" smtClean="0"/>
-              <a:t>03/11/2025</a:t>
+              <a:t>07/05/2026</a:t>
             </a:fld>
             <a:endParaRPr lang="en-BE"/>
           </a:p>
@@ -2383,7 +2273,7 @@
           <a:p>
             <a:fld id="{D8AE07B1-8807-B34B-B9EE-E033661A8799}" type="datetimeFigureOut">
               <a:rPr lang="en-BE" smtClean="0"/>
-              <a:t>03/11/2025</a:t>
+              <a:t>07/05/2026</a:t>
             </a:fld>
             <a:endParaRPr lang="en-BE"/>
           </a:p>
@@ -2798,7 +2688,7 @@
           <a:p>
             <a:fld id="{D8AE07B1-8807-B34B-B9EE-E033661A8799}" type="datetimeFigureOut">
               <a:rPr lang="en-BE" smtClean="0"/>
-              <a:t>03/11/2025</a:t>
+              <a:t>07/05/2026</a:t>
             </a:fld>
             <a:endParaRPr lang="en-BE"/>
           </a:p>
@@ -2940,7 +2830,7 @@
           <a:p>
             <a:fld id="{D8AE07B1-8807-B34B-B9EE-E033661A8799}" type="datetimeFigureOut">
               <a:rPr lang="en-BE" smtClean="0"/>
-              <a:t>03/11/2025</a:t>
+              <a:t>07/05/2026</a:t>
             </a:fld>
             <a:endParaRPr lang="en-BE"/>
           </a:p>
@@ -3053,7 +2943,7 @@
           <a:p>
             <a:fld id="{D8AE07B1-8807-B34B-B9EE-E033661A8799}" type="datetimeFigureOut">
               <a:rPr lang="en-BE" smtClean="0"/>
-              <a:t>03/11/2025</a:t>
+              <a:t>07/05/2026</a:t>
             </a:fld>
             <a:endParaRPr lang="en-BE"/>
           </a:p>
@@ -3366,7 +3256,7 @@
           <a:p>
             <a:fld id="{D8AE07B1-8807-B34B-B9EE-E033661A8799}" type="datetimeFigureOut">
               <a:rPr lang="en-BE" smtClean="0"/>
-              <a:t>03/11/2025</a:t>
+              <a:t>07/05/2026</a:t>
             </a:fld>
             <a:endParaRPr lang="en-BE"/>
           </a:p>
@@ -3655,7 +3545,7 @@
           <a:p>
             <a:fld id="{D8AE07B1-8807-B34B-B9EE-E033661A8799}" type="datetimeFigureOut">
               <a:rPr lang="en-BE" smtClean="0"/>
-              <a:t>03/11/2025</a:t>
+              <a:t>07/05/2026</a:t>
             </a:fld>
             <a:endParaRPr lang="en-BE"/>
           </a:p>
@@ -3898,7 +3788,7 @@
           <a:p>
             <a:fld id="{D8AE07B1-8807-B34B-B9EE-E033661A8799}" type="datetimeFigureOut">
               <a:rPr lang="en-BE" smtClean="0"/>
-              <a:t>03/11/2025</a:t>
+              <a:t>07/05/2026</a:t>
             </a:fld>
             <a:endParaRPr lang="en-BE"/>
           </a:p>
@@ -4369,7 +4259,7 @@
         </p:nvSpPr>
         <p:spPr>
           <a:xfrm flipH="1">
-            <a:off x="2406316" y="0"/>
+            <a:off x="2440406" y="321275"/>
             <a:ext cx="8217569" cy="3614940"/>
           </a:xfrm>
           <a:prstGeom prst="wedgeEllipseCallout">
@@ -4418,7 +4308,7 @@
         </p:nvSpPr>
         <p:spPr>
           <a:xfrm>
-            <a:off x="3278605" y="1068806"/>
+            <a:off x="3312695" y="1251582"/>
             <a:ext cx="6472989" cy="1754326"/>
           </a:xfrm>
           <a:prstGeom prst="rect">
@@ -4434,7 +4324,7 @@
           <a:p>
             <a:r>
               <a:rPr lang="en-BE" dirty="0"/>
-              <a:t>Hello human! Welcome to the castle grounds! In a moment, you will start your treasure hunt! Sadly enough, I will not be able to guide you . However, the castles are protected by my dragon Norbert. He will try to guide you to the treasure room. </a:t>
+              <a:t>Hello human! Welcome to the castle grounds! In a moment, you will start your treasure hunt! Sadly enough, I will not be able to guide you. However, the castles are protected by my dragon Norbert. He will try to guide you to the treasure room. </a:t>
             </a:r>
           </a:p>
           <a:p>
@@ -4479,7 +4369,7 @@
         <p:cNvPr id="1" name="">
           <a:extLst>
             <a:ext uri="{FF2B5EF4-FFF2-40B4-BE49-F238E27FC236}">
-              <a16:creationId xmlns:a16="http://schemas.microsoft.com/office/drawing/2014/main" id="{03644398-22E3-9BA0-CDCA-71F6E962B660}"/>
+              <a16:creationId xmlns:a16="http://schemas.microsoft.com/office/drawing/2014/main" id="{990559D0-A405-E3D5-125B-068A858A381A}"/>
             </a:ext>
           </a:extLst>
         </p:cNvPr>
@@ -4499,7 +4389,7 @@
           <p:cNvPr id="9" name="Picture 8" descr="A cartoon of a wizard&#10;&#10;AI-generated content may be incorrect.">
             <a:extLst>
               <a:ext uri="{FF2B5EF4-FFF2-40B4-BE49-F238E27FC236}">
-                <a16:creationId xmlns:a16="http://schemas.microsoft.com/office/drawing/2014/main" id="{7DCEDBBE-8826-4E66-08B8-5C8CCD87F570}"/>
+                <a16:creationId xmlns:a16="http://schemas.microsoft.com/office/drawing/2014/main" id="{220BAF58-31B9-A762-7802-6B40568DB279}"/>
               </a:ext>
             </a:extLst>
           </p:cNvPr>
@@ -4529,7 +4419,7 @@
           <p:cNvPr id="10" name="Oval Callout 9">
             <a:extLst>
               <a:ext uri="{FF2B5EF4-FFF2-40B4-BE49-F238E27FC236}">
-                <a16:creationId xmlns:a16="http://schemas.microsoft.com/office/drawing/2014/main" id="{B060DA24-0056-4561-FFDD-600EB916A55D}"/>
+                <a16:creationId xmlns:a16="http://schemas.microsoft.com/office/drawing/2014/main" id="{5F7B2AEE-E8F0-3803-ADA6-123A01F55781}"/>
               </a:ext>
             </a:extLst>
           </p:cNvPr>
@@ -4538,7 +4428,7 @@
         </p:nvSpPr>
         <p:spPr>
           <a:xfrm flipH="1">
-            <a:off x="2406315" y="261499"/>
+            <a:off x="2406316" y="0"/>
             <a:ext cx="8217569" cy="3614940"/>
           </a:xfrm>
           <a:prstGeom prst="wedgeEllipseCallout">
@@ -4573,74 +4463,12 @@
           </a:p>
         </p:txBody>
       </p:sp>
-      <p:sp>
-        <p:nvSpPr>
-          <p:cNvPr id="11" name="TextBox 10">
-            <a:extLst>
-              <a:ext uri="{FF2B5EF4-FFF2-40B4-BE49-F238E27FC236}">
-                <a16:creationId xmlns:a16="http://schemas.microsoft.com/office/drawing/2014/main" id="{2F8FE044-DFA5-830C-51A5-91701499144C}"/>
-              </a:ext>
-            </a:extLst>
-          </p:cNvPr>
-          <p:cNvSpPr txBox="1"/>
-          <p:nvPr/>
-        </p:nvSpPr>
-        <p:spPr>
-          <a:xfrm>
-            <a:off x="3537284" y="840379"/>
-            <a:ext cx="6472989" cy="2862322"/>
-          </a:xfrm>
-          <a:prstGeom prst="rect">
-            <a:avLst/>
-          </a:prstGeom>
-          <a:noFill/>
-        </p:spPr>
-        <p:txBody>
-          <a:bodyPr wrap="square" rtlCol="0">
-            <a:spAutoFit/>
-          </a:bodyPr>
-          <a:lstStyle/>
-          <a:p>
-            <a:r>
-              <a:rPr lang="en-BE" dirty="0"/>
-              <a:t>Norbert is able to change the color, the size of the square and the orientation of the line. </a:t>
-            </a:r>
-          </a:p>
-          <a:p>
-            <a:endParaRPr lang="en-BE" dirty="0"/>
-          </a:p>
-          <a:p>
-            <a:endParaRPr lang="en-BE" dirty="0"/>
-          </a:p>
-          <a:p>
-            <a:endParaRPr lang="en-BE" dirty="0"/>
-          </a:p>
-          <a:p>
-            <a:endParaRPr lang="en-BE" dirty="0"/>
-          </a:p>
-          <a:p>
-            <a:endParaRPr lang="en-BE" dirty="0"/>
-          </a:p>
-          <a:p>
-            <a:endParaRPr lang="en-BE" dirty="0"/>
-          </a:p>
-          <a:p>
-            <a:r>
-              <a:rPr lang="en-BE" dirty="0"/>
-              <a:t>Press space to continue</a:t>
-            </a:r>
-          </a:p>
-          <a:p>
-            <a:endParaRPr lang="en-BE" dirty="0"/>
-          </a:p>
-        </p:txBody>
-      </p:sp>
       <p:pic>
         <p:nvPicPr>
           <p:cNvPr id="2" name="Picture 1" descr="A green dragon with wings&#10;&#10;AI-generated content may be incorrect.">
             <a:extLst>
               <a:ext uri="{FF2B5EF4-FFF2-40B4-BE49-F238E27FC236}">
-                <a16:creationId xmlns:a16="http://schemas.microsoft.com/office/drawing/2014/main" id="{B630E386-C3A0-724E-C169-77433E24E3D6}"/>
+                <a16:creationId xmlns:a16="http://schemas.microsoft.com/office/drawing/2014/main" id="{8C250F1E-1CD4-4F05-3793-8E856FC4A958}"/>
               </a:ext>
             </a:extLst>
           </p:cNvPr>
@@ -4667,103 +4495,55 @@
       </p:pic>
       <p:sp>
         <p:nvSpPr>
-          <p:cNvPr id="3" name="Rectangle 2">
-            <a:extLst>
-              <a:ext uri="{FF2B5EF4-FFF2-40B4-BE49-F238E27FC236}">
-                <a16:creationId xmlns:a16="http://schemas.microsoft.com/office/drawing/2014/main" id="{82F653FA-3E73-B21A-F2BD-7059FCE07224}"/>
-              </a:ext>
-            </a:extLst>
-          </p:cNvPr>
-          <p:cNvSpPr/>
+          <p:cNvPr id="3" name="TextBox 2">
+            <a:extLst>
+              <a:ext uri="{FF2B5EF4-FFF2-40B4-BE49-F238E27FC236}">
+                <a16:creationId xmlns:a16="http://schemas.microsoft.com/office/drawing/2014/main" id="{E9EAFBAA-BA0E-0C79-9A86-355F184ADDA1}"/>
+              </a:ext>
+            </a:extLst>
+          </p:cNvPr>
+          <p:cNvSpPr txBox="1"/>
           <p:nvPr/>
         </p:nvSpPr>
         <p:spPr>
           <a:xfrm>
-            <a:off x="5206561" y="1633036"/>
-            <a:ext cx="2617076" cy="1277007"/>
+            <a:off x="3001879" y="1068806"/>
+            <a:ext cx="7026442" cy="1477328"/>
           </a:xfrm>
           <a:prstGeom prst="rect">
             <a:avLst/>
           </a:prstGeom>
           <a:noFill/>
-          <a:ln w="47625">
-            <a:solidFill>
-              <a:srgbClr val="1600DB"/>
-            </a:solidFill>
-          </a:ln>
-        </p:spPr>
-        <p:style>
-          <a:lnRef idx="2">
-            <a:schemeClr val="accent1">
-              <a:shade val="15000"/>
-            </a:schemeClr>
-          </a:lnRef>
-          <a:fillRef idx="1">
-            <a:schemeClr val="accent1"/>
-          </a:fillRef>
-          <a:effectRef idx="0">
-            <a:schemeClr val="accent1"/>
-          </a:effectRef>
-          <a:fontRef idx="minor">
-            <a:schemeClr val="lt1"/>
-          </a:fontRef>
-        </p:style>
-        <p:txBody>
-          <a:bodyPr rtlCol="0" anchor="ctr"/>
-          <a:lstStyle/>
-          <a:p>
-            <a:pPr algn="ctr"/>
-            <a:endParaRPr lang="en-BE"/>
-          </a:p>
-        </p:txBody>
-      </p:sp>
-      <p:cxnSp>
-        <p:nvCxnSpPr>
-          <p:cNvPr id="5" name="Straight Connector 4">
-            <a:extLst>
-              <a:ext uri="{FF2B5EF4-FFF2-40B4-BE49-F238E27FC236}">
-                <a16:creationId xmlns:a16="http://schemas.microsoft.com/office/drawing/2014/main" id="{998990F1-D930-305B-346B-1CFF5CF73E9E}"/>
-              </a:ext>
-            </a:extLst>
-          </p:cNvPr>
-          <p:cNvCxnSpPr>
-            <a:cxnSpLocks/>
-          </p:cNvCxnSpPr>
-          <p:nvPr/>
-        </p:nvCxnSpPr>
-        <p:spPr>
-          <a:xfrm>
-            <a:off x="5797152" y="2054730"/>
-            <a:ext cx="1435894" cy="433617"/>
-          </a:xfrm>
-          <a:prstGeom prst="line">
-            <a:avLst/>
-          </a:prstGeom>
-          <a:ln w="47625">
-            <a:solidFill>
-              <a:srgbClr val="1600DB"/>
-            </a:solidFill>
-          </a:ln>
-        </p:spPr>
-        <p:style>
-          <a:lnRef idx="2">
-            <a:schemeClr val="accent1"/>
-          </a:lnRef>
-          <a:fillRef idx="0">
-            <a:schemeClr val="accent1"/>
-          </a:fillRef>
-          <a:effectRef idx="1">
-            <a:schemeClr val="accent1"/>
-          </a:effectRef>
-          <a:fontRef idx="minor">
-            <a:schemeClr val="tx1"/>
-          </a:fontRef>
-        </p:style>
-      </p:cxnSp>
+        </p:spPr>
+        <p:txBody>
+          <a:bodyPr wrap="square" rtlCol="0">
+            <a:spAutoFit/>
+          </a:bodyPr>
+          <a:lstStyle/>
+          <a:p>
+            <a:r>
+              <a:rPr lang="en-BE" dirty="0"/>
+              <a:t>Try to figure out the rules of all castles as you’ll be tested on all of them in the test castle. </a:t>
+            </a:r>
+          </a:p>
+          <a:p>
+            <a:endParaRPr lang="en-BE" dirty="0"/>
+          </a:p>
+          <a:p>
+            <a:r>
+              <a:rPr lang="en-BE" dirty="0"/>
+              <a:t>Good luck!  Press space to continue</a:t>
+            </a:r>
+          </a:p>
+          <a:p>
+            <a:endParaRPr lang="en-BE" dirty="0"/>
+          </a:p>
+        </p:txBody>
+      </p:sp>
     </p:spTree>
     <p:extLst>
       <p:ext uri="{BB962C8B-B14F-4D97-AF65-F5344CB8AC3E}">
-        <p14:creationId xmlns:p14="http://schemas.microsoft.com/office/powerpoint/2010/main" val="3767554316"/>
+        <p14:creationId xmlns:p14="http://schemas.microsoft.com/office/powerpoint/2010/main" val="706750638"/>
       </p:ext>
     </p:extLst>
   </p:cSld>
@@ -4774,413 +4554,6 @@
 </file>
 
 <file path=ppt/slides/slide11.xml><?xml version="1.0" encoding="utf-8"?>
-<p:sld xmlns:a="http://schemas.openxmlformats.org/drawingml/2006/main" xmlns:r="http://schemas.openxmlformats.org/officeDocument/2006/relationships" xmlns:p="http://schemas.openxmlformats.org/presentationml/2006/main">
-  <p:cSld>
-    <p:bg>
-      <p:bgPr>
-        <a:solidFill>
-          <a:schemeClr val="bg2">
-            <a:lumMod val="50000"/>
-          </a:schemeClr>
-        </a:solidFill>
-        <a:effectLst/>
-      </p:bgPr>
-    </p:bg>
-    <p:spTree>
-      <p:nvGrpSpPr>
-        <p:cNvPr id="1" name="">
-          <a:extLst>
-            <a:ext uri="{FF2B5EF4-FFF2-40B4-BE49-F238E27FC236}">
-              <a16:creationId xmlns:a16="http://schemas.microsoft.com/office/drawing/2014/main" id="{844813CF-F0E0-A89D-9655-2427FA205C96}"/>
-            </a:ext>
-          </a:extLst>
-        </p:cNvPr>
-        <p:cNvGrpSpPr/>
-        <p:nvPr/>
-      </p:nvGrpSpPr>
-      <p:grpSpPr>
-        <a:xfrm>
-          <a:off x="0" y="0"/>
-          <a:ext cx="0" cy="0"/>
-          <a:chOff x="0" y="0"/>
-          <a:chExt cx="0" cy="0"/>
-        </a:xfrm>
-      </p:grpSpPr>
-      <p:pic>
-        <p:nvPicPr>
-          <p:cNvPr id="9" name="Picture 8" descr="A cartoon of a wizard&#10;&#10;AI-generated content may be incorrect.">
-            <a:extLst>
-              <a:ext uri="{FF2B5EF4-FFF2-40B4-BE49-F238E27FC236}">
-                <a16:creationId xmlns:a16="http://schemas.microsoft.com/office/drawing/2014/main" id="{2B171713-53AE-CFEA-7BC2-35AF0BD3FCC5}"/>
-              </a:ext>
-            </a:extLst>
-          </p:cNvPr>
-          <p:cNvPicPr>
-            <a:picLocks noChangeAspect="1"/>
-          </p:cNvPicPr>
-          <p:nvPr/>
-        </p:nvPicPr>
-        <p:blipFill>
-          <a:blip r:embed="rId2"/>
-          <a:stretch>
-            <a:fillRect/>
-          </a:stretch>
-        </p:blipFill>
-        <p:spPr>
-          <a:xfrm>
-            <a:off x="8684795" y="3429000"/>
-            <a:ext cx="2650957" cy="3614941"/>
-          </a:xfrm>
-          <a:prstGeom prst="rect">
-            <a:avLst/>
-          </a:prstGeom>
-        </p:spPr>
-      </p:pic>
-      <p:sp>
-        <p:nvSpPr>
-          <p:cNvPr id="10" name="Oval Callout 9">
-            <a:extLst>
-              <a:ext uri="{FF2B5EF4-FFF2-40B4-BE49-F238E27FC236}">
-                <a16:creationId xmlns:a16="http://schemas.microsoft.com/office/drawing/2014/main" id="{E5AB7CAC-20A3-641F-A192-0345EC3933EE}"/>
-              </a:ext>
-            </a:extLst>
-          </p:cNvPr>
-          <p:cNvSpPr/>
-          <p:nvPr/>
-        </p:nvSpPr>
-        <p:spPr>
-          <a:xfrm flipH="1">
-            <a:off x="2406315" y="261499"/>
-            <a:ext cx="8217569" cy="3614940"/>
-          </a:xfrm>
-          <a:prstGeom prst="wedgeEllipseCallout">
-            <a:avLst/>
-          </a:prstGeom>
-          <a:solidFill>
-            <a:schemeClr val="bg1"/>
-          </a:solidFill>
-        </p:spPr>
-        <p:style>
-          <a:lnRef idx="2">
-            <a:schemeClr val="accent1">
-              <a:shade val="15000"/>
-            </a:schemeClr>
-          </a:lnRef>
-          <a:fillRef idx="1">
-            <a:schemeClr val="accent1"/>
-          </a:fillRef>
-          <a:effectRef idx="0">
-            <a:schemeClr val="accent1"/>
-          </a:effectRef>
-          <a:fontRef idx="minor">
-            <a:schemeClr val="lt1"/>
-          </a:fontRef>
-        </p:style>
-        <p:txBody>
-          <a:bodyPr rtlCol="0" anchor="ctr"/>
-          <a:lstStyle/>
-          <a:p>
-            <a:pPr algn="ctr"/>
-            <a:endParaRPr lang="en-BE" dirty="0"/>
-          </a:p>
-        </p:txBody>
-      </p:sp>
-      <p:sp>
-        <p:nvSpPr>
-          <p:cNvPr id="11" name="TextBox 10">
-            <a:extLst>
-              <a:ext uri="{FF2B5EF4-FFF2-40B4-BE49-F238E27FC236}">
-                <a16:creationId xmlns:a16="http://schemas.microsoft.com/office/drawing/2014/main" id="{D67DB5F0-A81D-3188-8F3C-43C332E9BEF4}"/>
-              </a:ext>
-            </a:extLst>
-          </p:cNvPr>
-          <p:cNvSpPr txBox="1"/>
-          <p:nvPr/>
-        </p:nvSpPr>
-        <p:spPr>
-          <a:xfrm>
-            <a:off x="3537284" y="1468804"/>
-            <a:ext cx="6472989" cy="1754326"/>
-          </a:xfrm>
-          <a:prstGeom prst="rect">
-            <a:avLst/>
-          </a:prstGeom>
-          <a:noFill/>
-        </p:spPr>
-        <p:txBody>
-          <a:bodyPr wrap="square" rtlCol="0">
-            <a:spAutoFit/>
-          </a:bodyPr>
-          <a:lstStyle/>
-          <a:p>
-            <a:r>
-              <a:rPr lang="en-BE" dirty="0"/>
-              <a:t>With these features, Norbert will give you hints towards the location of the door using these three features. </a:t>
-            </a:r>
-          </a:p>
-          <a:p>
-            <a:r>
-              <a:rPr lang="en-BE" dirty="0"/>
-              <a:t>And remember, what you learn in an easier castle, can be learned in the more difficult ones. </a:t>
-            </a:r>
-          </a:p>
-          <a:p>
-            <a:endParaRPr lang="en-BE" dirty="0"/>
-          </a:p>
-          <a:p>
-            <a:r>
-              <a:rPr lang="en-BE" dirty="0"/>
-              <a:t>Press space to continue</a:t>
-            </a:r>
-          </a:p>
-        </p:txBody>
-      </p:sp>
-      <p:pic>
-        <p:nvPicPr>
-          <p:cNvPr id="2" name="Picture 1" descr="A green dragon with wings&#10;&#10;AI-generated content may be incorrect.">
-            <a:extLst>
-              <a:ext uri="{FF2B5EF4-FFF2-40B4-BE49-F238E27FC236}">
-                <a16:creationId xmlns:a16="http://schemas.microsoft.com/office/drawing/2014/main" id="{2D050554-5052-A8BC-0169-3E0999C915CE}"/>
-              </a:ext>
-            </a:extLst>
-          </p:cNvPr>
-          <p:cNvPicPr>
-            <a:picLocks noChangeAspect="1"/>
-          </p:cNvPicPr>
-          <p:nvPr/>
-        </p:nvPicPr>
-        <p:blipFill>
-          <a:blip r:embed="rId3"/>
-          <a:stretch>
-            <a:fillRect/>
-          </a:stretch>
-        </p:blipFill>
-        <p:spPr>
-          <a:xfrm>
-            <a:off x="528387" y="3261560"/>
-            <a:ext cx="3344779" cy="3334941"/>
-          </a:xfrm>
-          <a:prstGeom prst="rect">
-            <a:avLst/>
-          </a:prstGeom>
-        </p:spPr>
-      </p:pic>
-    </p:spTree>
-    <p:extLst>
-      <p:ext uri="{BB962C8B-B14F-4D97-AF65-F5344CB8AC3E}">
-        <p14:creationId xmlns:p14="http://schemas.microsoft.com/office/powerpoint/2010/main" val="3477181834"/>
-      </p:ext>
-    </p:extLst>
-  </p:cSld>
-  <p:clrMapOvr>
-    <a:masterClrMapping/>
-  </p:clrMapOvr>
-</p:sld>
-</file>
-
-<file path=ppt/slides/slide12.xml><?xml version="1.0" encoding="utf-8"?>
-<p:sld xmlns:a="http://schemas.openxmlformats.org/drawingml/2006/main" xmlns:r="http://schemas.openxmlformats.org/officeDocument/2006/relationships" xmlns:p="http://schemas.openxmlformats.org/presentationml/2006/main">
-  <p:cSld>
-    <p:bg>
-      <p:bgPr>
-        <a:solidFill>
-          <a:schemeClr val="bg2">
-            <a:lumMod val="50000"/>
-          </a:schemeClr>
-        </a:solidFill>
-        <a:effectLst/>
-      </p:bgPr>
-    </p:bg>
-    <p:spTree>
-      <p:nvGrpSpPr>
-        <p:cNvPr id="1" name="">
-          <a:extLst>
-            <a:ext uri="{FF2B5EF4-FFF2-40B4-BE49-F238E27FC236}">
-              <a16:creationId xmlns:a16="http://schemas.microsoft.com/office/drawing/2014/main" id="{08F0489C-50AA-36F2-BB7A-E38DAEBE1368}"/>
-            </a:ext>
-          </a:extLst>
-        </p:cNvPr>
-        <p:cNvGrpSpPr/>
-        <p:nvPr/>
-      </p:nvGrpSpPr>
-      <p:grpSpPr>
-        <a:xfrm>
-          <a:off x="0" y="0"/>
-          <a:ext cx="0" cy="0"/>
-          <a:chOff x="0" y="0"/>
-          <a:chExt cx="0" cy="0"/>
-        </a:xfrm>
-      </p:grpSpPr>
-      <p:pic>
-        <p:nvPicPr>
-          <p:cNvPr id="9" name="Picture 8" descr="A cartoon of a wizard&#10;&#10;AI-generated content may be incorrect.">
-            <a:extLst>
-              <a:ext uri="{FF2B5EF4-FFF2-40B4-BE49-F238E27FC236}">
-                <a16:creationId xmlns:a16="http://schemas.microsoft.com/office/drawing/2014/main" id="{DE1E3FC4-DD91-F179-F12D-D30EC734515E}"/>
-              </a:ext>
-            </a:extLst>
-          </p:cNvPr>
-          <p:cNvPicPr>
-            <a:picLocks noChangeAspect="1"/>
-          </p:cNvPicPr>
-          <p:nvPr/>
-        </p:nvPicPr>
-        <p:blipFill>
-          <a:blip r:embed="rId2"/>
-          <a:stretch>
-            <a:fillRect/>
-          </a:stretch>
-        </p:blipFill>
-        <p:spPr>
-          <a:xfrm>
-            <a:off x="8684795" y="3429000"/>
-            <a:ext cx="2650957" cy="3614941"/>
-          </a:xfrm>
-          <a:prstGeom prst="rect">
-            <a:avLst/>
-          </a:prstGeom>
-        </p:spPr>
-      </p:pic>
-      <p:sp>
-        <p:nvSpPr>
-          <p:cNvPr id="10" name="Oval Callout 9">
-            <a:extLst>
-              <a:ext uri="{FF2B5EF4-FFF2-40B4-BE49-F238E27FC236}">
-                <a16:creationId xmlns:a16="http://schemas.microsoft.com/office/drawing/2014/main" id="{ABD0E7DF-63A7-11D5-5977-F2365408984D}"/>
-              </a:ext>
-            </a:extLst>
-          </p:cNvPr>
-          <p:cNvSpPr/>
-          <p:nvPr/>
-        </p:nvSpPr>
-        <p:spPr>
-          <a:xfrm flipH="1">
-            <a:off x="2406316" y="0"/>
-            <a:ext cx="8217569" cy="3614940"/>
-          </a:xfrm>
-          <a:prstGeom prst="wedgeEllipseCallout">
-            <a:avLst/>
-          </a:prstGeom>
-          <a:solidFill>
-            <a:schemeClr val="bg1"/>
-          </a:solidFill>
-        </p:spPr>
-        <p:style>
-          <a:lnRef idx="2">
-            <a:schemeClr val="accent1">
-              <a:shade val="15000"/>
-            </a:schemeClr>
-          </a:lnRef>
-          <a:fillRef idx="1">
-            <a:schemeClr val="accent1"/>
-          </a:fillRef>
-          <a:effectRef idx="0">
-            <a:schemeClr val="accent1"/>
-          </a:effectRef>
-          <a:fontRef idx="minor">
-            <a:schemeClr val="lt1"/>
-          </a:fontRef>
-        </p:style>
-        <p:txBody>
-          <a:bodyPr rtlCol="0" anchor="ctr"/>
-          <a:lstStyle/>
-          <a:p>
-            <a:pPr algn="ctr"/>
-            <a:endParaRPr lang="en-BE" dirty="0"/>
-          </a:p>
-        </p:txBody>
-      </p:sp>
-      <p:pic>
-        <p:nvPicPr>
-          <p:cNvPr id="2" name="Picture 1" descr="A green dragon with wings&#10;&#10;AI-generated content may be incorrect.">
-            <a:extLst>
-              <a:ext uri="{FF2B5EF4-FFF2-40B4-BE49-F238E27FC236}">
-                <a16:creationId xmlns:a16="http://schemas.microsoft.com/office/drawing/2014/main" id="{1BCD192B-A5B2-0FAA-DD2B-14FA78B04F69}"/>
-              </a:ext>
-            </a:extLst>
-          </p:cNvPr>
-          <p:cNvPicPr>
-            <a:picLocks noChangeAspect="1"/>
-          </p:cNvPicPr>
-          <p:nvPr/>
-        </p:nvPicPr>
-        <p:blipFill>
-          <a:blip r:embed="rId3"/>
-          <a:stretch>
-            <a:fillRect/>
-          </a:stretch>
-        </p:blipFill>
-        <p:spPr>
-          <a:xfrm>
-            <a:off x="528387" y="3261560"/>
-            <a:ext cx="3344779" cy="3334941"/>
-          </a:xfrm>
-          <a:prstGeom prst="rect">
-            <a:avLst/>
-          </a:prstGeom>
-        </p:spPr>
-      </p:pic>
-      <p:sp>
-        <p:nvSpPr>
-          <p:cNvPr id="3" name="TextBox 2">
-            <a:extLst>
-              <a:ext uri="{FF2B5EF4-FFF2-40B4-BE49-F238E27FC236}">
-                <a16:creationId xmlns:a16="http://schemas.microsoft.com/office/drawing/2014/main" id="{04126421-0619-A202-F6FC-361758A50DAE}"/>
-              </a:ext>
-            </a:extLst>
-          </p:cNvPr>
-          <p:cNvSpPr txBox="1"/>
-          <p:nvPr/>
-        </p:nvSpPr>
-        <p:spPr>
-          <a:xfrm>
-            <a:off x="3007895" y="938463"/>
-            <a:ext cx="7026442" cy="2031325"/>
-          </a:xfrm>
-          <a:prstGeom prst="rect">
-            <a:avLst/>
-          </a:prstGeom>
-          <a:noFill/>
-        </p:spPr>
-        <p:txBody>
-          <a:bodyPr wrap="square" rtlCol="0">
-            <a:spAutoFit/>
-          </a:bodyPr>
-          <a:lstStyle/>
-          <a:p>
-            <a:r>
-              <a:rPr lang="en-BE" dirty="0"/>
-              <a:t>If you guess a door correctly, you can stay in the castle and try to get to the treasure room, but if you’re wrong, you are thrown out of the castle, but you can try again. Click on the castles and doors with your mouse to choose. </a:t>
-            </a:r>
-          </a:p>
-          <a:p>
-            <a:endParaRPr lang="en-BE" dirty="0"/>
-          </a:p>
-          <a:p>
-            <a:r>
-              <a:rPr lang="en-BE" dirty="0"/>
-              <a:t>Good luck!  Press space to continue</a:t>
-            </a:r>
-          </a:p>
-          <a:p>
-            <a:endParaRPr lang="en-BE" dirty="0"/>
-          </a:p>
-        </p:txBody>
-      </p:sp>
-    </p:spTree>
-    <p:extLst>
-      <p:ext uri="{BB962C8B-B14F-4D97-AF65-F5344CB8AC3E}">
-        <p14:creationId xmlns:p14="http://schemas.microsoft.com/office/powerpoint/2010/main" val="900169379"/>
-      </p:ext>
-    </p:extLst>
-  </p:cSld>
-  <p:clrMapOvr>
-    <a:masterClrMapping/>
-  </p:clrMapOvr>
-</p:sld>
-</file>
-
-<file path=ppt/slides/slide13.xml><?xml version="1.0" encoding="utf-8"?>
 <p:sld xmlns:a="http://schemas.openxmlformats.org/drawingml/2006/main" xmlns:r="http://schemas.openxmlformats.org/officeDocument/2006/relationships" xmlns:p="http://schemas.openxmlformats.org/presentationml/2006/main">
   <p:cSld>
     <p:bg>
@@ -5441,8 +4814,8 @@
         </p:nvSpPr>
         <p:spPr>
           <a:xfrm>
-            <a:off x="3340768" y="1484304"/>
-            <a:ext cx="6669505" cy="1200329"/>
+            <a:off x="3340768" y="1051818"/>
+            <a:ext cx="6669505" cy="1754326"/>
           </a:xfrm>
           <a:prstGeom prst="rect">
             <a:avLst/>
@@ -5457,7 +4830,7 @@
           <a:p>
             <a:r>
               <a:rPr lang="en-BE" dirty="0"/>
-              <a:t>In a moment, you will be able to choose between 3 castles. Once you enter, you will walk through a corridor until you reach a wall.</a:t>
+              <a:t>In a moment, you will be able to choose between 3 castles. Once you chose, you’ll enter that castle, and you’ll see a wall. In the wall, doors are hidden. I made sure you see where possible doors are with black rectangles. </a:t>
             </a:r>
           </a:p>
           <a:p>
@@ -5626,7 +4999,7 @@
           <a:p>
             <a:r>
               <a:rPr lang="en-BE" dirty="0"/>
-              <a:t>There are hidden doors in the wall that you need to find. If you get through 20 walls without missing, you will reach the treasure room. </a:t>
+              <a:t>You have to guess where the doors are hidden. If you get 10 correct, you’ll find the treasure in that castle. You can choose a door with the mouse. </a:t>
             </a:r>
           </a:p>
           <a:p>
@@ -5780,7 +5153,7 @@
         <p:spPr>
           <a:xfrm>
             <a:off x="3518214" y="1099062"/>
-            <a:ext cx="6605752" cy="1754326"/>
+            <a:ext cx="6605752" cy="1200329"/>
           </a:xfrm>
           <a:prstGeom prst="rect">
             <a:avLst/>
@@ -5795,7 +5168,7 @@
           <a:p>
             <a:r>
               <a:rPr lang="en-BE" dirty="0"/>
-              <a:t>It was only in my power to provide you with some possible locations and I put squares on the wall there. You need to guess where the hidden door is. If you get 20 correct in a row, you will reach the treasure room.</a:t>
+              <a:t>After 45 minutes, you’ll go to the master castle, where I will see if you know the rules of all castles. </a:t>
             </a:r>
           </a:p>
           <a:p>
@@ -5949,7 +5322,7 @@
         <p:spPr>
           <a:xfrm>
             <a:off x="3340768" y="1345805"/>
-            <a:ext cx="6669505" cy="1477328"/>
+            <a:ext cx="6669505" cy="1200329"/>
           </a:xfrm>
           <a:prstGeom prst="rect">
             <a:avLst/>
@@ -5964,7 +5337,7 @@
           <a:p>
             <a:r>
               <a:rPr lang="en-BE" dirty="0"/>
-              <a:t>But be warned, after some time, you will go to the master castle, where all castles will be merged and the treasure in the room there will be huge! So it is in your best interest to learn all castles!</a:t>
+              <a:t>If I see that you know the rules earlier than that, you can go to the master castle earlier and you’ll be done faster. </a:t>
             </a:r>
           </a:p>
           <a:p>
@@ -5992,344 +5365,6 @@
 </file>
 
 <file path=ppt/slides/slide6.xml><?xml version="1.0" encoding="utf-8"?>
-<p:sld xmlns:a="http://schemas.openxmlformats.org/drawingml/2006/main" xmlns:r="http://schemas.openxmlformats.org/officeDocument/2006/relationships" xmlns:p="http://schemas.openxmlformats.org/presentationml/2006/main">
-  <p:cSld>
-    <p:bg>
-      <p:bgPr>
-        <a:solidFill>
-          <a:schemeClr val="bg2">
-            <a:lumMod val="50000"/>
-          </a:schemeClr>
-        </a:solidFill>
-        <a:effectLst/>
-      </p:bgPr>
-    </p:bg>
-    <p:spTree>
-      <p:nvGrpSpPr>
-        <p:cNvPr id="1" name="">
-          <a:extLst>
-            <a:ext uri="{FF2B5EF4-FFF2-40B4-BE49-F238E27FC236}">
-              <a16:creationId xmlns:a16="http://schemas.microsoft.com/office/drawing/2014/main" id="{5AAECE3A-9788-D95F-4575-D9C46528C238}"/>
-            </a:ext>
-          </a:extLst>
-        </p:cNvPr>
-        <p:cNvGrpSpPr/>
-        <p:nvPr/>
-      </p:nvGrpSpPr>
-      <p:grpSpPr>
-        <a:xfrm>
-          <a:off x="0" y="0"/>
-          <a:ext cx="0" cy="0"/>
-          <a:chOff x="0" y="0"/>
-          <a:chExt cx="0" cy="0"/>
-        </a:xfrm>
-      </p:grpSpPr>
-      <p:pic>
-        <p:nvPicPr>
-          <p:cNvPr id="9" name="Picture 8" descr="A cartoon of a wizard&#10;&#10;AI-generated content may be incorrect.">
-            <a:extLst>
-              <a:ext uri="{FF2B5EF4-FFF2-40B4-BE49-F238E27FC236}">
-                <a16:creationId xmlns:a16="http://schemas.microsoft.com/office/drawing/2014/main" id="{40E1BCCA-D59D-122C-A1D1-DAE97E646EF6}"/>
-              </a:ext>
-            </a:extLst>
-          </p:cNvPr>
-          <p:cNvPicPr>
-            <a:picLocks noChangeAspect="1"/>
-          </p:cNvPicPr>
-          <p:nvPr/>
-        </p:nvPicPr>
-        <p:blipFill>
-          <a:blip r:embed="rId3"/>
-          <a:stretch>
-            <a:fillRect/>
-          </a:stretch>
-        </p:blipFill>
-        <p:spPr>
-          <a:xfrm>
-            <a:off x="8684795" y="3429000"/>
-            <a:ext cx="2650957" cy="3614941"/>
-          </a:xfrm>
-          <a:prstGeom prst="rect">
-            <a:avLst/>
-          </a:prstGeom>
-        </p:spPr>
-      </p:pic>
-      <p:sp>
-        <p:nvSpPr>
-          <p:cNvPr id="10" name="Oval Callout 9">
-            <a:extLst>
-              <a:ext uri="{FF2B5EF4-FFF2-40B4-BE49-F238E27FC236}">
-                <a16:creationId xmlns:a16="http://schemas.microsoft.com/office/drawing/2014/main" id="{51255D50-5107-E53F-B360-32FD7DF2C207}"/>
-              </a:ext>
-            </a:extLst>
-          </p:cNvPr>
-          <p:cNvSpPr/>
-          <p:nvPr/>
-        </p:nvSpPr>
-        <p:spPr>
-          <a:xfrm flipH="1">
-            <a:off x="2406316" y="0"/>
-            <a:ext cx="8217569" cy="3614940"/>
-          </a:xfrm>
-          <a:prstGeom prst="wedgeEllipseCallout">
-            <a:avLst/>
-          </a:prstGeom>
-          <a:solidFill>
-            <a:schemeClr val="bg1"/>
-          </a:solidFill>
-        </p:spPr>
-        <p:style>
-          <a:lnRef idx="2">
-            <a:schemeClr val="accent1">
-              <a:shade val="15000"/>
-            </a:schemeClr>
-          </a:lnRef>
-          <a:fillRef idx="1">
-            <a:schemeClr val="accent1"/>
-          </a:fillRef>
-          <a:effectRef idx="0">
-            <a:schemeClr val="accent1"/>
-          </a:effectRef>
-          <a:fontRef idx="minor">
-            <a:schemeClr val="lt1"/>
-          </a:fontRef>
-        </p:style>
-        <p:txBody>
-          <a:bodyPr rtlCol="0" anchor="ctr"/>
-          <a:lstStyle/>
-          <a:p>
-            <a:pPr algn="ctr"/>
-            <a:endParaRPr lang="en-BE" dirty="0"/>
-          </a:p>
-        </p:txBody>
-      </p:sp>
-      <p:sp>
-        <p:nvSpPr>
-          <p:cNvPr id="2" name="TextBox 1">
-            <a:extLst>
-              <a:ext uri="{FF2B5EF4-FFF2-40B4-BE49-F238E27FC236}">
-                <a16:creationId xmlns:a16="http://schemas.microsoft.com/office/drawing/2014/main" id="{AC858B4D-E552-F0CF-49F5-9C1CA64B2BF8}"/>
-              </a:ext>
-            </a:extLst>
-          </p:cNvPr>
-          <p:cNvSpPr txBox="1"/>
-          <p:nvPr/>
-        </p:nvSpPr>
-        <p:spPr>
-          <a:xfrm>
-            <a:off x="3720662" y="1119352"/>
-            <a:ext cx="5943600" cy="1477328"/>
-          </a:xfrm>
-          <a:prstGeom prst="rect">
-            <a:avLst/>
-          </a:prstGeom>
-          <a:noFill/>
-        </p:spPr>
-        <p:txBody>
-          <a:bodyPr wrap="square" rtlCol="0">
-            <a:spAutoFit/>
-          </a:bodyPr>
-          <a:lstStyle/>
-          <a:p>
-            <a:r>
-              <a:rPr lang="en-BE" dirty="0"/>
-              <a:t>It is very important to know that not all castles are equally difficult. You can see that because in some castles, there are more possible doors. </a:t>
-            </a:r>
-          </a:p>
-          <a:p>
-            <a:endParaRPr lang="en-BE" dirty="0"/>
-          </a:p>
-          <a:p>
-            <a:r>
-              <a:rPr lang="en-BE" dirty="0"/>
-              <a:t>Press space to continue</a:t>
-            </a:r>
-          </a:p>
-        </p:txBody>
-      </p:sp>
-    </p:spTree>
-    <p:extLst>
-      <p:ext uri="{BB962C8B-B14F-4D97-AF65-F5344CB8AC3E}">
-        <p14:creationId xmlns:p14="http://schemas.microsoft.com/office/powerpoint/2010/main" val="413882785"/>
-      </p:ext>
-    </p:extLst>
-  </p:cSld>
-  <p:clrMapOvr>
-    <a:masterClrMapping/>
-  </p:clrMapOvr>
-</p:sld>
-</file>
-
-<file path=ppt/slides/slide7.xml><?xml version="1.0" encoding="utf-8"?>
-<p:sld xmlns:a="http://schemas.openxmlformats.org/drawingml/2006/main" xmlns:r="http://schemas.openxmlformats.org/officeDocument/2006/relationships" xmlns:p="http://schemas.openxmlformats.org/presentationml/2006/main">
-  <p:cSld>
-    <p:bg>
-      <p:bgPr>
-        <a:solidFill>
-          <a:schemeClr val="bg2">
-            <a:lumMod val="50000"/>
-          </a:schemeClr>
-        </a:solidFill>
-        <a:effectLst/>
-      </p:bgPr>
-    </p:bg>
-    <p:spTree>
-      <p:nvGrpSpPr>
-        <p:cNvPr id="1" name="">
-          <a:extLst>
-            <a:ext uri="{FF2B5EF4-FFF2-40B4-BE49-F238E27FC236}">
-              <a16:creationId xmlns:a16="http://schemas.microsoft.com/office/drawing/2014/main" id="{F01F0D92-6277-51D9-BA19-C3C70AFC4176}"/>
-            </a:ext>
-          </a:extLst>
-        </p:cNvPr>
-        <p:cNvGrpSpPr/>
-        <p:nvPr/>
-      </p:nvGrpSpPr>
-      <p:grpSpPr>
-        <a:xfrm>
-          <a:off x="0" y="0"/>
-          <a:ext cx="0" cy="0"/>
-          <a:chOff x="0" y="0"/>
-          <a:chExt cx="0" cy="0"/>
-        </a:xfrm>
-      </p:grpSpPr>
-      <p:pic>
-        <p:nvPicPr>
-          <p:cNvPr id="9" name="Picture 8" descr="A cartoon of a wizard&#10;&#10;AI-generated content may be incorrect.">
-            <a:extLst>
-              <a:ext uri="{FF2B5EF4-FFF2-40B4-BE49-F238E27FC236}">
-                <a16:creationId xmlns:a16="http://schemas.microsoft.com/office/drawing/2014/main" id="{138A8470-ABC3-93E9-D31B-52732AEC834B}"/>
-              </a:ext>
-            </a:extLst>
-          </p:cNvPr>
-          <p:cNvPicPr>
-            <a:picLocks noChangeAspect="1"/>
-          </p:cNvPicPr>
-          <p:nvPr/>
-        </p:nvPicPr>
-        <p:blipFill>
-          <a:blip r:embed="rId2"/>
-          <a:stretch>
-            <a:fillRect/>
-          </a:stretch>
-        </p:blipFill>
-        <p:spPr>
-          <a:xfrm>
-            <a:off x="8684795" y="3429000"/>
-            <a:ext cx="2650957" cy="3614941"/>
-          </a:xfrm>
-          <a:prstGeom prst="rect">
-            <a:avLst/>
-          </a:prstGeom>
-        </p:spPr>
-      </p:pic>
-      <p:sp>
-        <p:nvSpPr>
-          <p:cNvPr id="10" name="Oval Callout 9">
-            <a:extLst>
-              <a:ext uri="{FF2B5EF4-FFF2-40B4-BE49-F238E27FC236}">
-                <a16:creationId xmlns:a16="http://schemas.microsoft.com/office/drawing/2014/main" id="{869D54C1-569E-6072-A2B6-E16E8722844C}"/>
-              </a:ext>
-            </a:extLst>
-          </p:cNvPr>
-          <p:cNvSpPr/>
-          <p:nvPr/>
-        </p:nvSpPr>
-        <p:spPr>
-          <a:xfrm flipH="1">
-            <a:off x="2406316" y="0"/>
-            <a:ext cx="8217569" cy="3614940"/>
-          </a:xfrm>
-          <a:prstGeom prst="wedgeEllipseCallout">
-            <a:avLst/>
-          </a:prstGeom>
-          <a:solidFill>
-            <a:schemeClr val="bg1"/>
-          </a:solidFill>
-        </p:spPr>
-        <p:style>
-          <a:lnRef idx="2">
-            <a:schemeClr val="accent1">
-              <a:shade val="15000"/>
-            </a:schemeClr>
-          </a:lnRef>
-          <a:fillRef idx="1">
-            <a:schemeClr val="accent1"/>
-          </a:fillRef>
-          <a:effectRef idx="0">
-            <a:schemeClr val="accent1"/>
-          </a:effectRef>
-          <a:fontRef idx="minor">
-            <a:schemeClr val="lt1"/>
-          </a:fontRef>
-        </p:style>
-        <p:txBody>
-          <a:bodyPr rtlCol="0" anchor="ctr"/>
-          <a:lstStyle/>
-          <a:p>
-            <a:pPr algn="ctr"/>
-            <a:endParaRPr lang="en-BE"/>
-          </a:p>
-        </p:txBody>
-      </p:sp>
-      <p:sp>
-        <p:nvSpPr>
-          <p:cNvPr id="11" name="TextBox 10">
-            <a:extLst>
-              <a:ext uri="{FF2B5EF4-FFF2-40B4-BE49-F238E27FC236}">
-                <a16:creationId xmlns:a16="http://schemas.microsoft.com/office/drawing/2014/main" id="{F15FE34A-7528-725D-F89A-F3C790D771CA}"/>
-              </a:ext>
-            </a:extLst>
-          </p:cNvPr>
-          <p:cNvSpPr txBox="1"/>
-          <p:nvPr/>
-        </p:nvSpPr>
-        <p:spPr>
-          <a:xfrm>
-            <a:off x="3312695" y="1391335"/>
-            <a:ext cx="6472989" cy="1477328"/>
-          </a:xfrm>
-          <a:prstGeom prst="rect">
-            <a:avLst/>
-          </a:prstGeom>
-          <a:noFill/>
-        </p:spPr>
-        <p:txBody>
-          <a:bodyPr wrap="square" rtlCol="0">
-            <a:spAutoFit/>
-          </a:bodyPr>
-          <a:lstStyle/>
-          <a:p>
-            <a:r>
-              <a:rPr lang="en-BE" dirty="0"/>
-              <a:t>But very important. To help you a bit, I made sure that what you learn in the easier castles, can be used in later castles. The rules you uncover will remain the same. </a:t>
-            </a:r>
-          </a:p>
-          <a:p>
-            <a:endParaRPr lang="en-BE" dirty="0"/>
-          </a:p>
-          <a:p>
-            <a:r>
-              <a:rPr lang="en-BE" dirty="0"/>
-              <a:t>Press space to continue</a:t>
-            </a:r>
-          </a:p>
-        </p:txBody>
-      </p:sp>
-    </p:spTree>
-    <p:extLst>
-      <p:ext uri="{BB962C8B-B14F-4D97-AF65-F5344CB8AC3E}">
-        <p14:creationId xmlns:p14="http://schemas.microsoft.com/office/powerpoint/2010/main" val="643420050"/>
-      </p:ext>
-    </p:extLst>
-  </p:cSld>
-  <p:clrMapOvr>
-    <a:masterClrMapping/>
-  </p:clrMapOvr>
-</p:sld>
-</file>
-
-<file path=ppt/slides/slide8.xml><?xml version="1.0" encoding="utf-8"?>
 <p:sld xmlns:a="http://schemas.openxmlformats.org/drawingml/2006/main" xmlns:r="http://schemas.openxmlformats.org/officeDocument/2006/relationships" xmlns:p="http://schemas.openxmlformats.org/presentationml/2006/main">
   <p:cSld>
     <p:bg>
@@ -6455,8 +5490,8 @@
         </p:nvSpPr>
         <p:spPr>
           <a:xfrm>
-            <a:off x="3708768" y="1068806"/>
-            <a:ext cx="6301505" cy="2031325"/>
+            <a:off x="3708768" y="747531"/>
+            <a:ext cx="6301505" cy="2308324"/>
           </a:xfrm>
           <a:prstGeom prst="rect">
             <a:avLst/>
@@ -6471,7 +5506,7 @@
           <a:p>
             <a:r>
               <a:rPr lang="en-BE" dirty="0"/>
-              <a:t>So, I will need to go to the order now, but let me introduce you to my dragon Norbert who will try to guide you. I was able to teach him about sizes of squares, colors and orientations and he will provide you with hints using these features. It is your job to figure out what the rules are! </a:t>
+              <a:t>So, I will need to go now, but let me introduce you to my dragon Norbert who will try to guide you. Sadly enough, Norgert cannot talk yet. However, I was able to teach him how to communicate using figures. I was able to teach him about sizes of squares, colors and orientations. It is your job to figure out what the rules are! </a:t>
             </a:r>
           </a:p>
           <a:p>
@@ -6528,7 +5563,7 @@
 </p:sld>
 </file>
 
-<file path=ppt/slides/slide9.xml><?xml version="1.0" encoding="utf-8"?>
+<file path=ppt/slides/slide7.xml><?xml version="1.0" encoding="utf-8"?>
 <p:sld xmlns:a="http://schemas.openxmlformats.org/drawingml/2006/main" xmlns:r="http://schemas.openxmlformats.org/officeDocument/2006/relationships" xmlns:p="http://schemas.openxmlformats.org/presentationml/2006/main">
   <p:cSld>
     <p:bg>
@@ -6670,7 +5705,7 @@
           <a:p>
             <a:r>
               <a:rPr lang="en-BE" dirty="0"/>
-              <a:t>Here is an example of what I was able to learn him on such short notice: </a:t>
+              <a:t>Here is an example of what I was able to learn him in short notice: </a:t>
             </a:r>
           </a:p>
           <a:p>
@@ -6828,6 +5863,523 @@
     <p:extLst>
       <p:ext uri="{BB962C8B-B14F-4D97-AF65-F5344CB8AC3E}">
         <p14:creationId xmlns:p14="http://schemas.microsoft.com/office/powerpoint/2010/main" val="2171367322"/>
+      </p:ext>
+    </p:extLst>
+  </p:cSld>
+  <p:clrMapOvr>
+    <a:masterClrMapping/>
+  </p:clrMapOvr>
+</p:sld>
+</file>
+
+<file path=ppt/slides/slide8.xml><?xml version="1.0" encoding="utf-8"?>
+<p:sld xmlns:a="http://schemas.openxmlformats.org/drawingml/2006/main" xmlns:r="http://schemas.openxmlformats.org/officeDocument/2006/relationships" xmlns:p="http://schemas.openxmlformats.org/presentationml/2006/main">
+  <p:cSld>
+    <p:bg>
+      <p:bgPr>
+        <a:solidFill>
+          <a:schemeClr val="bg2">
+            <a:lumMod val="50000"/>
+          </a:schemeClr>
+        </a:solidFill>
+        <a:effectLst/>
+      </p:bgPr>
+    </p:bg>
+    <p:spTree>
+      <p:nvGrpSpPr>
+        <p:cNvPr id="1" name="">
+          <a:extLst>
+            <a:ext uri="{FF2B5EF4-FFF2-40B4-BE49-F238E27FC236}">
+              <a16:creationId xmlns:a16="http://schemas.microsoft.com/office/drawing/2014/main" id="{03644398-22E3-9BA0-CDCA-71F6E962B660}"/>
+            </a:ext>
+          </a:extLst>
+        </p:cNvPr>
+        <p:cNvGrpSpPr/>
+        <p:nvPr/>
+      </p:nvGrpSpPr>
+      <p:grpSpPr>
+        <a:xfrm>
+          <a:off x="0" y="0"/>
+          <a:ext cx="0" cy="0"/>
+          <a:chOff x="0" y="0"/>
+          <a:chExt cx="0" cy="0"/>
+        </a:xfrm>
+      </p:grpSpPr>
+      <p:pic>
+        <p:nvPicPr>
+          <p:cNvPr id="9" name="Picture 8" descr="A cartoon of a wizard&#10;&#10;AI-generated content may be incorrect.">
+            <a:extLst>
+              <a:ext uri="{FF2B5EF4-FFF2-40B4-BE49-F238E27FC236}">
+                <a16:creationId xmlns:a16="http://schemas.microsoft.com/office/drawing/2014/main" id="{7DCEDBBE-8826-4E66-08B8-5C8CCD87F570}"/>
+              </a:ext>
+            </a:extLst>
+          </p:cNvPr>
+          <p:cNvPicPr>
+            <a:picLocks noChangeAspect="1"/>
+          </p:cNvPicPr>
+          <p:nvPr/>
+        </p:nvPicPr>
+        <p:blipFill>
+          <a:blip r:embed="rId2"/>
+          <a:stretch>
+            <a:fillRect/>
+          </a:stretch>
+        </p:blipFill>
+        <p:spPr>
+          <a:xfrm>
+            <a:off x="8684795" y="3429000"/>
+            <a:ext cx="2650957" cy="3614941"/>
+          </a:xfrm>
+          <a:prstGeom prst="rect">
+            <a:avLst/>
+          </a:prstGeom>
+        </p:spPr>
+      </p:pic>
+      <p:sp>
+        <p:nvSpPr>
+          <p:cNvPr id="10" name="Oval Callout 9">
+            <a:extLst>
+              <a:ext uri="{FF2B5EF4-FFF2-40B4-BE49-F238E27FC236}">
+                <a16:creationId xmlns:a16="http://schemas.microsoft.com/office/drawing/2014/main" id="{B060DA24-0056-4561-FFDD-600EB916A55D}"/>
+              </a:ext>
+            </a:extLst>
+          </p:cNvPr>
+          <p:cNvSpPr/>
+          <p:nvPr/>
+        </p:nvSpPr>
+        <p:spPr>
+          <a:xfrm flipH="1">
+            <a:off x="2406315" y="261499"/>
+            <a:ext cx="8217569" cy="3614940"/>
+          </a:xfrm>
+          <a:prstGeom prst="wedgeEllipseCallout">
+            <a:avLst/>
+          </a:prstGeom>
+          <a:solidFill>
+            <a:schemeClr val="bg1"/>
+          </a:solidFill>
+        </p:spPr>
+        <p:style>
+          <a:lnRef idx="2">
+            <a:schemeClr val="accent1">
+              <a:shade val="15000"/>
+            </a:schemeClr>
+          </a:lnRef>
+          <a:fillRef idx="1">
+            <a:schemeClr val="accent1"/>
+          </a:fillRef>
+          <a:effectRef idx="0">
+            <a:schemeClr val="accent1"/>
+          </a:effectRef>
+          <a:fontRef idx="minor">
+            <a:schemeClr val="lt1"/>
+          </a:fontRef>
+        </p:style>
+        <p:txBody>
+          <a:bodyPr rtlCol="0" anchor="ctr"/>
+          <a:lstStyle/>
+          <a:p>
+            <a:pPr algn="ctr"/>
+            <a:endParaRPr lang="en-BE" dirty="0"/>
+          </a:p>
+        </p:txBody>
+      </p:sp>
+      <p:sp>
+        <p:nvSpPr>
+          <p:cNvPr id="11" name="TextBox 10">
+            <a:extLst>
+              <a:ext uri="{FF2B5EF4-FFF2-40B4-BE49-F238E27FC236}">
+                <a16:creationId xmlns:a16="http://schemas.microsoft.com/office/drawing/2014/main" id="{2F8FE044-DFA5-830C-51A5-91701499144C}"/>
+              </a:ext>
+            </a:extLst>
+          </p:cNvPr>
+          <p:cNvSpPr txBox="1"/>
+          <p:nvPr/>
+        </p:nvSpPr>
+        <p:spPr>
+          <a:xfrm>
+            <a:off x="3537284" y="840379"/>
+            <a:ext cx="6472989" cy="2862322"/>
+          </a:xfrm>
+          <a:prstGeom prst="rect">
+            <a:avLst/>
+          </a:prstGeom>
+          <a:noFill/>
+        </p:spPr>
+        <p:txBody>
+          <a:bodyPr wrap="square" rtlCol="0">
+            <a:spAutoFit/>
+          </a:bodyPr>
+          <a:lstStyle/>
+          <a:p>
+            <a:r>
+              <a:rPr lang="en-BE" dirty="0"/>
+              <a:t>Norbert is able to change the size of the square, the orientation of the line and the color of the figure</a:t>
+            </a:r>
+          </a:p>
+          <a:p>
+            <a:endParaRPr lang="en-BE" dirty="0"/>
+          </a:p>
+          <a:p>
+            <a:endParaRPr lang="en-BE" dirty="0"/>
+          </a:p>
+          <a:p>
+            <a:endParaRPr lang="en-BE" dirty="0"/>
+          </a:p>
+          <a:p>
+            <a:endParaRPr lang="en-BE" dirty="0"/>
+          </a:p>
+          <a:p>
+            <a:endParaRPr lang="en-BE" dirty="0"/>
+          </a:p>
+          <a:p>
+            <a:endParaRPr lang="en-BE" dirty="0"/>
+          </a:p>
+          <a:p>
+            <a:r>
+              <a:rPr lang="en-BE" dirty="0"/>
+              <a:t>Press space to continue</a:t>
+            </a:r>
+          </a:p>
+          <a:p>
+            <a:endParaRPr lang="en-BE" dirty="0"/>
+          </a:p>
+        </p:txBody>
+      </p:sp>
+      <p:pic>
+        <p:nvPicPr>
+          <p:cNvPr id="2" name="Picture 1" descr="A green dragon with wings&#10;&#10;AI-generated content may be incorrect.">
+            <a:extLst>
+              <a:ext uri="{FF2B5EF4-FFF2-40B4-BE49-F238E27FC236}">
+                <a16:creationId xmlns:a16="http://schemas.microsoft.com/office/drawing/2014/main" id="{B630E386-C3A0-724E-C169-77433E24E3D6}"/>
+              </a:ext>
+            </a:extLst>
+          </p:cNvPr>
+          <p:cNvPicPr>
+            <a:picLocks noChangeAspect="1"/>
+          </p:cNvPicPr>
+          <p:nvPr/>
+        </p:nvPicPr>
+        <p:blipFill>
+          <a:blip r:embed="rId3"/>
+          <a:stretch>
+            <a:fillRect/>
+          </a:stretch>
+        </p:blipFill>
+        <p:spPr>
+          <a:xfrm>
+            <a:off x="528387" y="3261560"/>
+            <a:ext cx="3344779" cy="3334941"/>
+          </a:xfrm>
+          <a:prstGeom prst="rect">
+            <a:avLst/>
+          </a:prstGeom>
+        </p:spPr>
+      </p:pic>
+      <p:sp>
+        <p:nvSpPr>
+          <p:cNvPr id="3" name="Rectangle 2">
+            <a:extLst>
+              <a:ext uri="{FF2B5EF4-FFF2-40B4-BE49-F238E27FC236}">
+                <a16:creationId xmlns:a16="http://schemas.microsoft.com/office/drawing/2014/main" id="{82F653FA-3E73-B21A-F2BD-7059FCE07224}"/>
+              </a:ext>
+            </a:extLst>
+          </p:cNvPr>
+          <p:cNvSpPr/>
+          <p:nvPr/>
+        </p:nvSpPr>
+        <p:spPr>
+          <a:xfrm>
+            <a:off x="5206561" y="1633036"/>
+            <a:ext cx="2617076" cy="1277007"/>
+          </a:xfrm>
+          <a:prstGeom prst="rect">
+            <a:avLst/>
+          </a:prstGeom>
+          <a:noFill/>
+          <a:ln w="47625">
+            <a:solidFill>
+              <a:srgbClr val="1600DB"/>
+            </a:solidFill>
+          </a:ln>
+        </p:spPr>
+        <p:style>
+          <a:lnRef idx="2">
+            <a:schemeClr val="accent1">
+              <a:shade val="15000"/>
+            </a:schemeClr>
+          </a:lnRef>
+          <a:fillRef idx="1">
+            <a:schemeClr val="accent1"/>
+          </a:fillRef>
+          <a:effectRef idx="0">
+            <a:schemeClr val="accent1"/>
+          </a:effectRef>
+          <a:fontRef idx="minor">
+            <a:schemeClr val="lt1"/>
+          </a:fontRef>
+        </p:style>
+        <p:txBody>
+          <a:bodyPr rtlCol="0" anchor="ctr"/>
+          <a:lstStyle/>
+          <a:p>
+            <a:pPr algn="ctr"/>
+            <a:endParaRPr lang="en-BE"/>
+          </a:p>
+        </p:txBody>
+      </p:sp>
+      <p:cxnSp>
+        <p:nvCxnSpPr>
+          <p:cNvPr id="5" name="Straight Connector 4">
+            <a:extLst>
+              <a:ext uri="{FF2B5EF4-FFF2-40B4-BE49-F238E27FC236}">
+                <a16:creationId xmlns:a16="http://schemas.microsoft.com/office/drawing/2014/main" id="{998990F1-D930-305B-346B-1CFF5CF73E9E}"/>
+              </a:ext>
+            </a:extLst>
+          </p:cNvPr>
+          <p:cNvCxnSpPr>
+            <a:cxnSpLocks/>
+          </p:cNvCxnSpPr>
+          <p:nvPr/>
+        </p:nvCxnSpPr>
+        <p:spPr>
+          <a:xfrm>
+            <a:off x="5797152" y="2054730"/>
+            <a:ext cx="1435894" cy="433617"/>
+          </a:xfrm>
+          <a:prstGeom prst="line">
+            <a:avLst/>
+          </a:prstGeom>
+          <a:ln w="47625">
+            <a:solidFill>
+              <a:srgbClr val="1600DB"/>
+            </a:solidFill>
+          </a:ln>
+        </p:spPr>
+        <p:style>
+          <a:lnRef idx="2">
+            <a:schemeClr val="accent1"/>
+          </a:lnRef>
+          <a:fillRef idx="0">
+            <a:schemeClr val="accent1"/>
+          </a:fillRef>
+          <a:effectRef idx="1">
+            <a:schemeClr val="accent1"/>
+          </a:effectRef>
+          <a:fontRef idx="minor">
+            <a:schemeClr val="tx1"/>
+          </a:fontRef>
+        </p:style>
+      </p:cxnSp>
+    </p:spTree>
+    <p:extLst>
+      <p:ext uri="{BB962C8B-B14F-4D97-AF65-F5344CB8AC3E}">
+        <p14:creationId xmlns:p14="http://schemas.microsoft.com/office/powerpoint/2010/main" val="3767554316"/>
+      </p:ext>
+    </p:extLst>
+  </p:cSld>
+  <p:clrMapOvr>
+    <a:masterClrMapping/>
+  </p:clrMapOvr>
+</p:sld>
+</file>
+
+<file path=ppt/slides/slide9.xml><?xml version="1.0" encoding="utf-8"?>
+<p:sld xmlns:a="http://schemas.openxmlformats.org/drawingml/2006/main" xmlns:r="http://schemas.openxmlformats.org/officeDocument/2006/relationships" xmlns:p="http://schemas.openxmlformats.org/presentationml/2006/main">
+  <p:cSld>
+    <p:bg>
+      <p:bgPr>
+        <a:solidFill>
+          <a:schemeClr val="bg2">
+            <a:lumMod val="50000"/>
+          </a:schemeClr>
+        </a:solidFill>
+        <a:effectLst/>
+      </p:bgPr>
+    </p:bg>
+    <p:spTree>
+      <p:nvGrpSpPr>
+        <p:cNvPr id="1" name="">
+          <a:extLst>
+            <a:ext uri="{FF2B5EF4-FFF2-40B4-BE49-F238E27FC236}">
+              <a16:creationId xmlns:a16="http://schemas.microsoft.com/office/drawing/2014/main" id="{844813CF-F0E0-A89D-9655-2427FA205C96}"/>
+            </a:ext>
+          </a:extLst>
+        </p:cNvPr>
+        <p:cNvGrpSpPr/>
+        <p:nvPr/>
+      </p:nvGrpSpPr>
+      <p:grpSpPr>
+        <a:xfrm>
+          <a:off x="0" y="0"/>
+          <a:ext cx="0" cy="0"/>
+          <a:chOff x="0" y="0"/>
+          <a:chExt cx="0" cy="0"/>
+        </a:xfrm>
+      </p:grpSpPr>
+      <p:pic>
+        <p:nvPicPr>
+          <p:cNvPr id="9" name="Picture 8" descr="A cartoon of a wizard&#10;&#10;AI-generated content may be incorrect.">
+            <a:extLst>
+              <a:ext uri="{FF2B5EF4-FFF2-40B4-BE49-F238E27FC236}">
+                <a16:creationId xmlns:a16="http://schemas.microsoft.com/office/drawing/2014/main" id="{2B171713-53AE-CFEA-7BC2-35AF0BD3FCC5}"/>
+              </a:ext>
+            </a:extLst>
+          </p:cNvPr>
+          <p:cNvPicPr>
+            <a:picLocks noChangeAspect="1"/>
+          </p:cNvPicPr>
+          <p:nvPr/>
+        </p:nvPicPr>
+        <p:blipFill>
+          <a:blip r:embed="rId2"/>
+          <a:stretch>
+            <a:fillRect/>
+          </a:stretch>
+        </p:blipFill>
+        <p:spPr>
+          <a:xfrm>
+            <a:off x="8684795" y="3429000"/>
+            <a:ext cx="2650957" cy="3614941"/>
+          </a:xfrm>
+          <a:prstGeom prst="rect">
+            <a:avLst/>
+          </a:prstGeom>
+        </p:spPr>
+      </p:pic>
+      <p:sp>
+        <p:nvSpPr>
+          <p:cNvPr id="10" name="Oval Callout 9">
+            <a:extLst>
+              <a:ext uri="{FF2B5EF4-FFF2-40B4-BE49-F238E27FC236}">
+                <a16:creationId xmlns:a16="http://schemas.microsoft.com/office/drawing/2014/main" id="{E5AB7CAC-20A3-641F-A192-0345EC3933EE}"/>
+              </a:ext>
+            </a:extLst>
+          </p:cNvPr>
+          <p:cNvSpPr/>
+          <p:nvPr/>
+        </p:nvSpPr>
+        <p:spPr>
+          <a:xfrm flipH="1">
+            <a:off x="2406315" y="261499"/>
+            <a:ext cx="8217569" cy="3614940"/>
+          </a:xfrm>
+          <a:prstGeom prst="wedgeEllipseCallout">
+            <a:avLst/>
+          </a:prstGeom>
+          <a:solidFill>
+            <a:schemeClr val="bg1"/>
+          </a:solidFill>
+        </p:spPr>
+        <p:style>
+          <a:lnRef idx="2">
+            <a:schemeClr val="accent1">
+              <a:shade val="15000"/>
+            </a:schemeClr>
+          </a:lnRef>
+          <a:fillRef idx="1">
+            <a:schemeClr val="accent1"/>
+          </a:fillRef>
+          <a:effectRef idx="0">
+            <a:schemeClr val="accent1"/>
+          </a:effectRef>
+          <a:fontRef idx="minor">
+            <a:schemeClr val="lt1"/>
+          </a:fontRef>
+        </p:style>
+        <p:txBody>
+          <a:bodyPr rtlCol="0" anchor="ctr"/>
+          <a:lstStyle/>
+          <a:p>
+            <a:pPr algn="ctr"/>
+            <a:endParaRPr lang="en-BE" dirty="0"/>
+          </a:p>
+        </p:txBody>
+      </p:sp>
+      <p:sp>
+        <p:nvSpPr>
+          <p:cNvPr id="11" name="TextBox 10">
+            <a:extLst>
+              <a:ext uri="{FF2B5EF4-FFF2-40B4-BE49-F238E27FC236}">
+                <a16:creationId xmlns:a16="http://schemas.microsoft.com/office/drawing/2014/main" id="{D67DB5F0-A81D-3188-8F3C-43C332E9BEF4}"/>
+              </a:ext>
+            </a:extLst>
+          </p:cNvPr>
+          <p:cNvSpPr txBox="1"/>
+          <p:nvPr/>
+        </p:nvSpPr>
+        <p:spPr>
+          <a:xfrm>
+            <a:off x="3537284" y="1230235"/>
+            <a:ext cx="6472989" cy="2031325"/>
+          </a:xfrm>
+          <a:prstGeom prst="rect">
+            <a:avLst/>
+          </a:prstGeom>
+          <a:noFill/>
+        </p:spPr>
+        <p:txBody>
+          <a:bodyPr wrap="square" rtlCol="0">
+            <a:spAutoFit/>
+          </a:bodyPr>
+          <a:lstStyle/>
+          <a:p>
+            <a:r>
+              <a:rPr lang="en-BE" dirty="0"/>
+              <a:t>With these features, Norbert will give you hints towards the location of the door. </a:t>
+            </a:r>
+          </a:p>
+          <a:p>
+            <a:r>
+              <a:rPr lang="en-BE" dirty="0"/>
+              <a:t>As long as you are correct, you stay in a castle, once you’re wrong, you can choose a new (or the same) castle. Always use the mouse to decide. </a:t>
+            </a:r>
+          </a:p>
+          <a:p>
+            <a:endParaRPr lang="en-BE" dirty="0"/>
+          </a:p>
+          <a:p>
+            <a:r>
+              <a:rPr lang="en-BE" dirty="0"/>
+              <a:t>Press space to continue</a:t>
+            </a:r>
+          </a:p>
+        </p:txBody>
+      </p:sp>
+      <p:pic>
+        <p:nvPicPr>
+          <p:cNvPr id="2" name="Picture 1" descr="A green dragon with wings&#10;&#10;AI-generated content may be incorrect.">
+            <a:extLst>
+              <a:ext uri="{FF2B5EF4-FFF2-40B4-BE49-F238E27FC236}">
+                <a16:creationId xmlns:a16="http://schemas.microsoft.com/office/drawing/2014/main" id="{2D050554-5052-A8BC-0169-3E0999C915CE}"/>
+              </a:ext>
+            </a:extLst>
+          </p:cNvPr>
+          <p:cNvPicPr>
+            <a:picLocks noChangeAspect="1"/>
+          </p:cNvPicPr>
+          <p:nvPr/>
+        </p:nvPicPr>
+        <p:blipFill>
+          <a:blip r:embed="rId3"/>
+          <a:stretch>
+            <a:fillRect/>
+          </a:stretch>
+        </p:blipFill>
+        <p:spPr>
+          <a:xfrm>
+            <a:off x="528387" y="3261560"/>
+            <a:ext cx="3344779" cy="3334941"/>
+          </a:xfrm>
+          <a:prstGeom prst="rect">
+            <a:avLst/>
+          </a:prstGeom>
+        </p:spPr>
+      </p:pic>
+    </p:spTree>
+    <p:extLst>
+      <p:ext uri="{BB962C8B-B14F-4D97-AF65-F5344CB8AC3E}">
+        <p14:creationId xmlns:p14="http://schemas.microsoft.com/office/powerpoint/2010/main" val="3477181834"/>
       </p:ext>
     </p:extLst>
   </p:cSld>
